--- a/FinsurgeENRIMS_Features_v2.pptx
+++ b/FinsurgeENRIMS_Features_v2.pptx
@@ -12,6 +12,8 @@
     <p:sldId id="260" r:id="rId11"/>
     <p:sldId id="261" r:id="rId12"/>
     <p:sldId id="262" r:id="rId13"/>
+    <p:sldId id="263" r:id="rId14"/>
+    <p:sldId id="264" r:id="rId15"/>
   </p:sldIdLst>
   <p:sldSz cx="9144000" cy="6858000" type="screen4x3"/>
   <p:notesSz cx="6858000" cy="9144000"/>
@@ -6200,6 +6202,992 @@
             </a:pPr>
             <a:r>
               <a:t>Risk appetite heatmaps by geography, merchant, customer segment. SLA compliance dashboard: target vs actual. Regulatory filing deadlines with countdown. Production-ready monitoring with Prometheus metrics and alerting.</a:t>
+            </a:r>
+          </a:p>
+        </p:txBody>
+      </p:sp>
+    </p:spTree>
+  </p:cSld>
+  <p:clrMapOvr>
+    <a:masterClrMapping/>
+  </p:clrMapOvr>
+</p:sld>
+</file>
+
+<file path=ppt/slides/slide8.xml><?xml version="1.0" encoding="utf-8"?>
+<p:sld xmlns:a="http://schemas.openxmlformats.org/drawingml/2006/main" xmlns:p="http://schemas.openxmlformats.org/presentationml/2006/main" xmlns:r="http://schemas.openxmlformats.org/officeDocument/2006/relationships">
+  <p:cSld>
+    <p:bg>
+      <p:bgPr>
+        <a:solidFill>
+          <a:srgbClr val="F5F7FA"/>
+        </a:solidFill>
+        <a:effectLst/>
+      </p:bgPr>
+    </p:bg>
+    <p:spTree>
+      <p:nvGrpSpPr>
+        <p:cNvPr id="1" name=""/>
+        <p:cNvGrpSpPr/>
+        <p:nvPr/>
+      </p:nvGrpSpPr>
+      <p:grpSpPr/>
+      <p:pic>
+        <p:nvPicPr>
+          <p:cNvPr id="2" name="Picture 1" descr="finsurgelogo.png"/>
+          <p:cNvPicPr>
+            <a:picLocks noChangeAspect="1"/>
+          </p:cNvPicPr>
+          <p:nvPr/>
+        </p:nvPicPr>
+        <p:blipFill>
+          <a:blip r:embed="rId2"/>
+          <a:stretch>
+            <a:fillRect/>
+          </a:stretch>
+        </p:blipFill>
+        <p:spPr>
+          <a:xfrm>
+            <a:off x="8229600" y="274320"/>
+            <a:ext cx="640080" cy="603849"/>
+          </a:xfrm>
+          <a:prstGeom prst="rect">
+            <a:avLst/>
+          </a:prstGeom>
+        </p:spPr>
+      </p:pic>
+      <p:sp>
+        <p:nvSpPr>
+          <p:cNvPr id="3" name="Rectangle 2"/>
+          <p:cNvSpPr/>
+          <p:nvPr/>
+        </p:nvSpPr>
+        <p:spPr>
+          <a:xfrm>
+            <a:off x="0" y="0"/>
+            <a:ext cx="9144000" cy="731520"/>
+          </a:xfrm>
+          <a:prstGeom prst="rect">
+            <a:avLst/>
+          </a:prstGeom>
+          <a:solidFill>
+            <a:srgbClr val="4B55B4"/>
+          </a:solidFill>
+          <a:ln>
+            <a:solidFill>
+              <a:srgbClr val="4B55B4"/>
+            </a:solidFill>
+          </a:ln>
+        </p:spPr>
+        <p:style>
+          <a:lnRef idx="1">
+            <a:schemeClr val="accent1"/>
+          </a:lnRef>
+          <a:fillRef idx="3">
+            <a:schemeClr val="accent1"/>
+          </a:fillRef>
+          <a:effectRef idx="2">
+            <a:schemeClr val="accent1"/>
+          </a:effectRef>
+          <a:fontRef idx="minor">
+            <a:schemeClr val="lt1"/>
+          </a:fontRef>
+        </p:style>
+        <p:txBody>
+          <a:bodyPr rtlCol="0" anchor="ctr"/>
+          <a:lstStyle/>
+          <a:p>
+            <a:pPr algn="ctr"/>
+          </a:p>
+        </p:txBody>
+      </p:sp>
+      <p:sp>
+        <p:nvSpPr>
+          <p:cNvPr id="4" name="TextBox 3"/>
+          <p:cNvSpPr txBox="1"/>
+          <p:nvPr/>
+        </p:nvSpPr>
+        <p:spPr>
+          <a:xfrm>
+            <a:off x="457200" y="137160"/>
+            <a:ext cx="7315200" cy="548640"/>
+          </a:xfrm>
+          <a:prstGeom prst="rect">
+            <a:avLst/>
+          </a:prstGeom>
+          <a:noFill/>
+        </p:spPr>
+        <p:txBody>
+          <a:bodyPr wrap="none">
+            <a:spAutoFit/>
+          </a:bodyPr>
+          <a:lstStyle/>
+          <a:p>
+            <a:pPr>
+              <a:defRPr sz="4000" b="1">
+                <a:solidFill>
+                  <a:srgbClr val="FFFFFF"/>
+                </a:solidFill>
+              </a:defRPr>
+            </a:pPr>
+            <a:r>
+              <a:t>Risk Score Calculation Model</a:t>
+            </a:r>
+          </a:p>
+        </p:txBody>
+      </p:sp>
+      <p:sp>
+        <p:nvSpPr>
+          <p:cNvPr id="5" name="Rectangle 4"/>
+          <p:cNvSpPr/>
+          <p:nvPr/>
+        </p:nvSpPr>
+        <p:spPr>
+          <a:xfrm>
+            <a:off x="274320" y="1097280"/>
+            <a:ext cx="91440" cy="365760"/>
+          </a:xfrm>
+          <a:prstGeom prst="rect">
+            <a:avLst/>
+          </a:prstGeom>
+          <a:solidFill>
+            <a:srgbClr val="FF6600"/>
+          </a:solidFill>
+          <a:ln>
+            <a:solidFill>
+              <a:srgbClr val="FF6600"/>
+            </a:solidFill>
+          </a:ln>
+        </p:spPr>
+        <p:style>
+          <a:lnRef idx="1">
+            <a:schemeClr val="accent1"/>
+          </a:lnRef>
+          <a:fillRef idx="3">
+            <a:schemeClr val="accent1"/>
+          </a:fillRef>
+          <a:effectRef idx="2">
+            <a:schemeClr val="accent1"/>
+          </a:effectRef>
+          <a:fontRef idx="minor">
+            <a:schemeClr val="lt1"/>
+          </a:fontRef>
+        </p:style>
+        <p:txBody>
+          <a:bodyPr rtlCol="0" anchor="ctr"/>
+          <a:lstStyle/>
+          <a:p>
+            <a:pPr algn="ctr"/>
+          </a:p>
+        </p:txBody>
+      </p:sp>
+      <p:sp>
+        <p:nvSpPr>
+          <p:cNvPr id="6" name="TextBox 5"/>
+          <p:cNvSpPr txBox="1"/>
+          <p:nvPr/>
+        </p:nvSpPr>
+        <p:spPr>
+          <a:xfrm>
+            <a:off x="548640" y="1097280"/>
+            <a:ext cx="8229600" cy="320040"/>
+          </a:xfrm>
+          <a:prstGeom prst="rect">
+            <a:avLst/>
+          </a:prstGeom>
+          <a:noFill/>
+        </p:spPr>
+        <p:txBody>
+          <a:bodyPr wrap="none">
+            <a:spAutoFit/>
+          </a:bodyPr>
+          <a:lstStyle/>
+          <a:p>
+            <a:pPr>
+              <a:defRPr sz="1800" b="1">
+                <a:solidFill>
+                  <a:srgbClr val="4B55B4"/>
+                </a:solidFill>
+              </a:defRPr>
+            </a:pPr>
+            <a:r>
+              <a:t>💹 Transaction Risk Score (0-100)</a:t>
+            </a:r>
+          </a:p>
+        </p:txBody>
+      </p:sp>
+      <p:sp>
+        <p:nvSpPr>
+          <p:cNvPr id="7" name="TextBox 6"/>
+          <p:cNvSpPr txBox="1"/>
+          <p:nvPr/>
+        </p:nvSpPr>
+        <p:spPr>
+          <a:xfrm>
+            <a:off x="548640" y="1463040"/>
+            <a:ext cx="8229600" cy="1097280"/>
+          </a:xfrm>
+          <a:prstGeom prst="rect">
+            <a:avLst/>
+          </a:prstGeom>
+          <a:noFill/>
+        </p:spPr>
+        <p:txBody>
+          <a:bodyPr wrap="square">
+            <a:spAutoFit/>
+          </a:bodyPr>
+          <a:lstStyle/>
+          <a:p>
+            <a:pPr>
+              <a:spcBef>
+                <a:spcPts val="300"/>
+              </a:spcBef>
+              <a:spcAft>
+                <a:spcPts val="300"/>
+              </a:spcAft>
+              <a:defRPr sz="1400">
+                <a:solidFill>
+                  <a:srgbClr val="282828"/>
+                </a:solidFill>
+              </a:defRPr>
+            </a:pPr>
+            <a:r>
+              <a:t>Base: 10pt | Rule Severity: Critical +40, High +25, Medium +15, Low +5 | Channel: SWIFT +10, Branch/ATM +5, Internet/Mobile +3, POS +2 | Customer Category: very_high +35, high +20, medium +10, low 0. Example: 10+25+10+35=80/100</a:t>
+            </a:r>
+          </a:p>
+        </p:txBody>
+      </p:sp>
+      <p:sp>
+        <p:nvSpPr>
+          <p:cNvPr id="8" name="Rectangle 7"/>
+          <p:cNvSpPr/>
+          <p:nvPr/>
+        </p:nvSpPr>
+        <p:spPr>
+          <a:xfrm>
+            <a:off x="274320" y="2560320"/>
+            <a:ext cx="91440" cy="365760"/>
+          </a:xfrm>
+          <a:prstGeom prst="rect">
+            <a:avLst/>
+          </a:prstGeom>
+          <a:solidFill>
+            <a:srgbClr val="FF6600"/>
+          </a:solidFill>
+          <a:ln>
+            <a:solidFill>
+              <a:srgbClr val="FF6600"/>
+            </a:solidFill>
+          </a:ln>
+        </p:spPr>
+        <p:style>
+          <a:lnRef idx="1">
+            <a:schemeClr val="accent1"/>
+          </a:lnRef>
+          <a:fillRef idx="3">
+            <a:schemeClr val="accent1"/>
+          </a:fillRef>
+          <a:effectRef idx="2">
+            <a:schemeClr val="accent1"/>
+          </a:effectRef>
+          <a:fontRef idx="minor">
+            <a:schemeClr val="lt1"/>
+          </a:fontRef>
+        </p:style>
+        <p:txBody>
+          <a:bodyPr rtlCol="0" anchor="ctr"/>
+          <a:lstStyle/>
+          <a:p>
+            <a:pPr algn="ctr"/>
+          </a:p>
+        </p:txBody>
+      </p:sp>
+      <p:sp>
+        <p:nvSpPr>
+          <p:cNvPr id="9" name="TextBox 8"/>
+          <p:cNvSpPr txBox="1"/>
+          <p:nvPr/>
+        </p:nvSpPr>
+        <p:spPr>
+          <a:xfrm>
+            <a:off x="548640" y="2560320"/>
+            <a:ext cx="8229600" cy="320040"/>
+          </a:xfrm>
+          <a:prstGeom prst="rect">
+            <a:avLst/>
+          </a:prstGeom>
+          <a:noFill/>
+        </p:spPr>
+        <p:txBody>
+          <a:bodyPr wrap="none">
+            <a:spAutoFit/>
+          </a:bodyPr>
+          <a:lstStyle/>
+          <a:p>
+            <a:pPr>
+              <a:defRPr sz="1800" b="1">
+                <a:solidFill>
+                  <a:srgbClr val="4B55B4"/>
+                </a:solidFill>
+              </a:defRPr>
+            </a:pPr>
+            <a:r>
+              <a:t>👥 Customer Risk Score (Weighted Rolling)</a:t>
+            </a:r>
+          </a:p>
+        </p:txBody>
+      </p:sp>
+      <p:sp>
+        <p:nvSpPr>
+          <p:cNvPr id="10" name="TextBox 9"/>
+          <p:cNvSpPr txBox="1"/>
+          <p:nvPr/>
+        </p:nvSpPr>
+        <p:spPr>
+          <a:xfrm>
+            <a:off x="548640" y="2926079"/>
+            <a:ext cx="8229600" cy="1097280"/>
+          </a:xfrm>
+          <a:prstGeom prst="rect">
+            <a:avLst/>
+          </a:prstGeom>
+          <a:noFill/>
+        </p:spPr>
+        <p:txBody>
+          <a:bodyPr wrap="square">
+            <a:spAutoFit/>
+          </a:bodyPr>
+          <a:lstStyle/>
+          <a:p>
+            <a:pPr>
+              <a:spcBef>
+                <a:spcPts val="300"/>
+              </a:spcBef>
+              <a:spcAft>
+                <a:spcPts val="300"/>
+              </a:spcAft>
+              <a:defRPr sz="1400">
+                <a:solidFill>
+                  <a:srgbClr val="282828"/>
+                </a:solidFill>
+              </a:defRPr>
+            </a:pPr>
+            <a:r>
+              <a:t>Previous score + adjustment per matched rule (capped at 100). Critical rule: +5, High: +3, Medium: +1.5, Low: +0.5. Example: Score 70 + two critical rules = min(70+5+5, 100) = 80/100</a:t>
+            </a:r>
+          </a:p>
+        </p:txBody>
+      </p:sp>
+      <p:sp>
+        <p:nvSpPr>
+          <p:cNvPr id="11" name="Rectangle 10"/>
+          <p:cNvSpPr/>
+          <p:nvPr/>
+        </p:nvSpPr>
+        <p:spPr>
+          <a:xfrm>
+            <a:off x="274320" y="4023360"/>
+            <a:ext cx="91440" cy="365760"/>
+          </a:xfrm>
+          <a:prstGeom prst="rect">
+            <a:avLst/>
+          </a:prstGeom>
+          <a:solidFill>
+            <a:srgbClr val="FF6600"/>
+          </a:solidFill>
+          <a:ln>
+            <a:solidFill>
+              <a:srgbClr val="FF6600"/>
+            </a:solidFill>
+          </a:ln>
+        </p:spPr>
+        <p:style>
+          <a:lnRef idx="1">
+            <a:schemeClr val="accent1"/>
+          </a:lnRef>
+          <a:fillRef idx="3">
+            <a:schemeClr val="accent1"/>
+          </a:fillRef>
+          <a:effectRef idx="2">
+            <a:schemeClr val="accent1"/>
+          </a:effectRef>
+          <a:fontRef idx="minor">
+            <a:schemeClr val="lt1"/>
+          </a:fontRef>
+        </p:style>
+        <p:txBody>
+          <a:bodyPr rtlCol="0" anchor="ctr"/>
+          <a:lstStyle/>
+          <a:p>
+            <a:pPr algn="ctr"/>
+          </a:p>
+        </p:txBody>
+      </p:sp>
+      <p:sp>
+        <p:nvSpPr>
+          <p:cNvPr id="12" name="TextBox 11"/>
+          <p:cNvSpPr txBox="1"/>
+          <p:nvPr/>
+        </p:nvSpPr>
+        <p:spPr>
+          <a:xfrm>
+            <a:off x="548640" y="4023360"/>
+            <a:ext cx="8229600" cy="320040"/>
+          </a:xfrm>
+          <a:prstGeom prst="rect">
+            <a:avLst/>
+          </a:prstGeom>
+          <a:noFill/>
+        </p:spPr>
+        <p:txBody>
+          <a:bodyPr wrap="none">
+            <a:spAutoFit/>
+          </a:bodyPr>
+          <a:lstStyle/>
+          <a:p>
+            <a:pPr>
+              <a:defRPr sz="1800" b="1">
+                <a:solidFill>
+                  <a:srgbClr val="4B55B4"/>
+                </a:solidFill>
+              </a:defRPr>
+            </a:pPr>
+            <a:r>
+              <a:t>🎯 Auto-Assigned Risk Categories</a:t>
+            </a:r>
+          </a:p>
+        </p:txBody>
+      </p:sp>
+      <p:sp>
+        <p:nvSpPr>
+          <p:cNvPr id="13" name="TextBox 12"/>
+          <p:cNvSpPr txBox="1"/>
+          <p:nvPr/>
+        </p:nvSpPr>
+        <p:spPr>
+          <a:xfrm>
+            <a:off x="548640" y="4389120"/>
+            <a:ext cx="8229600" cy="1097280"/>
+          </a:xfrm>
+          <a:prstGeom prst="rect">
+            <a:avLst/>
+          </a:prstGeom>
+          <a:noFill/>
+        </p:spPr>
+        <p:txBody>
+          <a:bodyPr wrap="square">
+            <a:spAutoFit/>
+          </a:bodyPr>
+          <a:lstStyle/>
+          <a:p>
+            <a:pPr>
+              <a:spcBef>
+                <a:spcPts val="300"/>
+              </a:spcBef>
+              <a:spcAft>
+                <a:spcPts val="300"/>
+              </a:spcAft>
+              <a:defRPr sz="1400">
+                <a:solidFill>
+                  <a:srgbClr val="282828"/>
+                </a:solidFill>
+              </a:defRPr>
+            </a:pPr>
+            <a:r>
+              <a:t>75-100: very_high (🔴 strict monitoring) | 50-74: high (🟠 enhanced rules) | 25-49: medium (🟡 standard) | 0-24: low (🟢 minimal). Higher scores = stricter alert sensitivity, automatic.</a:t>
+            </a:r>
+          </a:p>
+        </p:txBody>
+      </p:sp>
+    </p:spTree>
+  </p:cSld>
+  <p:clrMapOvr>
+    <a:masterClrMapping/>
+  </p:clrMapOvr>
+</p:sld>
+</file>
+
+<file path=ppt/slides/slide9.xml><?xml version="1.0" encoding="utf-8"?>
+<p:sld xmlns:a="http://schemas.openxmlformats.org/drawingml/2006/main" xmlns:p="http://schemas.openxmlformats.org/presentationml/2006/main" xmlns:r="http://schemas.openxmlformats.org/officeDocument/2006/relationships">
+  <p:cSld>
+    <p:bg>
+      <p:bgPr>
+        <a:solidFill>
+          <a:srgbClr val="F5F7FA"/>
+        </a:solidFill>
+        <a:effectLst/>
+      </p:bgPr>
+    </p:bg>
+    <p:spTree>
+      <p:nvGrpSpPr>
+        <p:cNvPr id="1" name=""/>
+        <p:cNvGrpSpPr/>
+        <p:nvPr/>
+      </p:nvGrpSpPr>
+      <p:grpSpPr/>
+      <p:pic>
+        <p:nvPicPr>
+          <p:cNvPr id="2" name="Picture 1" descr="finsurgelogo.png"/>
+          <p:cNvPicPr>
+            <a:picLocks noChangeAspect="1"/>
+          </p:cNvPicPr>
+          <p:nvPr/>
+        </p:nvPicPr>
+        <p:blipFill>
+          <a:blip r:embed="rId2"/>
+          <a:stretch>
+            <a:fillRect/>
+          </a:stretch>
+        </p:blipFill>
+        <p:spPr>
+          <a:xfrm>
+            <a:off x="8229600" y="274320"/>
+            <a:ext cx="640080" cy="603849"/>
+          </a:xfrm>
+          <a:prstGeom prst="rect">
+            <a:avLst/>
+          </a:prstGeom>
+        </p:spPr>
+      </p:pic>
+      <p:sp>
+        <p:nvSpPr>
+          <p:cNvPr id="3" name="Rectangle 2"/>
+          <p:cNvSpPr/>
+          <p:nvPr/>
+        </p:nvSpPr>
+        <p:spPr>
+          <a:xfrm>
+            <a:off x="0" y="0"/>
+            <a:ext cx="9144000" cy="731520"/>
+          </a:xfrm>
+          <a:prstGeom prst="rect">
+            <a:avLst/>
+          </a:prstGeom>
+          <a:solidFill>
+            <a:srgbClr val="4B55B4"/>
+          </a:solidFill>
+          <a:ln>
+            <a:solidFill>
+              <a:srgbClr val="4B55B4"/>
+            </a:solidFill>
+          </a:ln>
+        </p:spPr>
+        <p:style>
+          <a:lnRef idx="1">
+            <a:schemeClr val="accent1"/>
+          </a:lnRef>
+          <a:fillRef idx="3">
+            <a:schemeClr val="accent1"/>
+          </a:fillRef>
+          <a:effectRef idx="2">
+            <a:schemeClr val="accent1"/>
+          </a:effectRef>
+          <a:fontRef idx="minor">
+            <a:schemeClr val="lt1"/>
+          </a:fontRef>
+        </p:style>
+        <p:txBody>
+          <a:bodyPr rtlCol="0" anchor="ctr"/>
+          <a:lstStyle/>
+          <a:p>
+            <a:pPr algn="ctr"/>
+          </a:p>
+        </p:txBody>
+      </p:sp>
+      <p:sp>
+        <p:nvSpPr>
+          <p:cNvPr id="4" name="TextBox 3"/>
+          <p:cNvSpPr txBox="1"/>
+          <p:nvPr/>
+        </p:nvSpPr>
+        <p:spPr>
+          <a:xfrm>
+            <a:off x="457200" y="137160"/>
+            <a:ext cx="7315200" cy="548640"/>
+          </a:xfrm>
+          <a:prstGeom prst="rect">
+            <a:avLst/>
+          </a:prstGeom>
+          <a:noFill/>
+        </p:spPr>
+        <p:txBody>
+          <a:bodyPr wrap="none">
+            <a:spAutoFit/>
+          </a:bodyPr>
+          <a:lstStyle/>
+          <a:p>
+            <a:pPr>
+              <a:defRPr sz="4000" b="1">
+                <a:solidFill>
+                  <a:srgbClr val="FFFFFF"/>
+                </a:solidFill>
+              </a:defRPr>
+            </a:pPr>
+            <a:r>
+              <a:t>Risk Appetite Monitoring — CRO Dashboard</a:t>
+            </a:r>
+          </a:p>
+        </p:txBody>
+      </p:sp>
+      <p:sp>
+        <p:nvSpPr>
+          <p:cNvPr id="5" name="Rectangle 4"/>
+          <p:cNvSpPr/>
+          <p:nvPr/>
+        </p:nvSpPr>
+        <p:spPr>
+          <a:xfrm>
+            <a:off x="274320" y="1097280"/>
+            <a:ext cx="91440" cy="365760"/>
+          </a:xfrm>
+          <a:prstGeom prst="rect">
+            <a:avLst/>
+          </a:prstGeom>
+          <a:solidFill>
+            <a:srgbClr val="FF6600"/>
+          </a:solidFill>
+          <a:ln>
+            <a:solidFill>
+              <a:srgbClr val="FF6600"/>
+            </a:solidFill>
+          </a:ln>
+        </p:spPr>
+        <p:style>
+          <a:lnRef idx="1">
+            <a:schemeClr val="accent1"/>
+          </a:lnRef>
+          <a:fillRef idx="3">
+            <a:schemeClr val="accent1"/>
+          </a:fillRef>
+          <a:effectRef idx="2">
+            <a:schemeClr val="accent1"/>
+          </a:effectRef>
+          <a:fontRef idx="minor">
+            <a:schemeClr val="lt1"/>
+          </a:fontRef>
+        </p:style>
+        <p:txBody>
+          <a:bodyPr rtlCol="0" anchor="ctr"/>
+          <a:lstStyle/>
+          <a:p>
+            <a:pPr algn="ctr"/>
+          </a:p>
+        </p:txBody>
+      </p:sp>
+      <p:sp>
+        <p:nvSpPr>
+          <p:cNvPr id="6" name="TextBox 5"/>
+          <p:cNvSpPr txBox="1"/>
+          <p:nvPr/>
+        </p:nvSpPr>
+        <p:spPr>
+          <a:xfrm>
+            <a:off x="548640" y="1097280"/>
+            <a:ext cx="8229600" cy="320040"/>
+          </a:xfrm>
+          <a:prstGeom prst="rect">
+            <a:avLst/>
+          </a:prstGeom>
+          <a:noFill/>
+        </p:spPr>
+        <p:txBody>
+          <a:bodyPr wrap="none">
+            <a:spAutoFit/>
+          </a:bodyPr>
+          <a:lstStyle/>
+          <a:p>
+            <a:pPr>
+              <a:defRPr sz="1800" b="1">
+                <a:solidFill>
+                  <a:srgbClr val="4B55B4"/>
+                </a:solidFill>
+              </a:defRPr>
+            </a:pPr>
+            <a:r>
+              <a:t>📊 5 Portfolio-Level Metrics</a:t>
+            </a:r>
+          </a:p>
+        </p:txBody>
+      </p:sp>
+      <p:sp>
+        <p:nvSpPr>
+          <p:cNvPr id="7" name="TextBox 6"/>
+          <p:cNvSpPr txBox="1"/>
+          <p:nvPr/>
+        </p:nvSpPr>
+        <p:spPr>
+          <a:xfrm>
+            <a:off x="548640" y="1463040"/>
+            <a:ext cx="8229600" cy="1097280"/>
+          </a:xfrm>
+          <a:prstGeom prst="rect">
+            <a:avLst/>
+          </a:prstGeom>
+          <a:noFill/>
+        </p:spPr>
+        <p:txBody>
+          <a:bodyPr wrap="square">
+            <a:spAutoFit/>
+          </a:bodyPr>
+          <a:lstStyle/>
+          <a:p>
+            <a:pPr>
+              <a:spcBef>
+                <a:spcPts val="300"/>
+              </a:spcBef>
+              <a:spcAft>
+                <a:spcPts val="300"/>
+              </a:spcAft>
+              <a:defRPr sz="1400">
+                <a:solidFill>
+                  <a:srgbClr val="282828"/>
+                </a:solidFill>
+              </a:defRPr>
+            </a:pPr>
+            <a:r>
+              <a:t>1️⃣ High-Risk Customer Exposure: (very_high / total) × 100% [Limit: 15% | Warning: 12%] | 2️⃣ Portfolio Avg Risk: Mean risk_score [Limit: 45 | Warning: 35] | 3️⃣ PEP Exposure: (PEP / total) × 100% [Limit: 5% | Warning: 3%]</a:t>
+            </a:r>
+          </a:p>
+        </p:txBody>
+      </p:sp>
+      <p:sp>
+        <p:nvSpPr>
+          <p:cNvPr id="8" name="Rectangle 7"/>
+          <p:cNvSpPr/>
+          <p:nvPr/>
+        </p:nvSpPr>
+        <p:spPr>
+          <a:xfrm>
+            <a:off x="274320" y="2560320"/>
+            <a:ext cx="91440" cy="365760"/>
+          </a:xfrm>
+          <a:prstGeom prst="rect">
+            <a:avLst/>
+          </a:prstGeom>
+          <a:solidFill>
+            <a:srgbClr val="FF6600"/>
+          </a:solidFill>
+          <a:ln>
+            <a:solidFill>
+              <a:srgbClr val="FF6600"/>
+            </a:solidFill>
+          </a:ln>
+        </p:spPr>
+        <p:style>
+          <a:lnRef idx="1">
+            <a:schemeClr val="accent1"/>
+          </a:lnRef>
+          <a:fillRef idx="3">
+            <a:schemeClr val="accent1"/>
+          </a:fillRef>
+          <a:effectRef idx="2">
+            <a:schemeClr val="accent1"/>
+          </a:effectRef>
+          <a:fontRef idx="minor">
+            <a:schemeClr val="lt1"/>
+          </a:fontRef>
+        </p:style>
+        <p:txBody>
+          <a:bodyPr rtlCol="0" anchor="ctr"/>
+          <a:lstStyle/>
+          <a:p>
+            <a:pPr algn="ctr"/>
+          </a:p>
+        </p:txBody>
+      </p:sp>
+      <p:sp>
+        <p:nvSpPr>
+          <p:cNvPr id="9" name="TextBox 8"/>
+          <p:cNvSpPr txBox="1"/>
+          <p:nvPr/>
+        </p:nvSpPr>
+        <p:spPr>
+          <a:xfrm>
+            <a:off x="548640" y="2560320"/>
+            <a:ext cx="8229600" cy="320040"/>
+          </a:xfrm>
+          <a:prstGeom prst="rect">
+            <a:avLst/>
+          </a:prstGeom>
+          <a:noFill/>
+        </p:spPr>
+        <p:txBody>
+          <a:bodyPr wrap="none">
+            <a:spAutoFit/>
+          </a:bodyPr>
+          <a:lstStyle/>
+          <a:p>
+            <a:pPr>
+              <a:defRPr sz="1800" b="1">
+                <a:solidFill>
+                  <a:srgbClr val="4B55B4"/>
+                </a:solidFill>
+              </a:defRPr>
+            </a:pPr>
+            <a:r>
+              <a:t>🎯 SLA &amp; Transaction Metrics</a:t>
+            </a:r>
+          </a:p>
+        </p:txBody>
+      </p:sp>
+      <p:sp>
+        <p:nvSpPr>
+          <p:cNvPr id="10" name="TextBox 9"/>
+          <p:cNvSpPr txBox="1"/>
+          <p:nvPr/>
+        </p:nvSpPr>
+        <p:spPr>
+          <a:xfrm>
+            <a:off x="548640" y="2926079"/>
+            <a:ext cx="8229600" cy="1097280"/>
+          </a:xfrm>
+          <a:prstGeom prst="rect">
+            <a:avLst/>
+          </a:prstGeom>
+          <a:noFill/>
+        </p:spPr>
+        <p:txBody>
+          <a:bodyPr wrap="square">
+            <a:spAutoFit/>
+          </a:bodyPr>
+          <a:lstStyle/>
+          <a:p>
+            <a:pPr>
+              <a:spcBef>
+                <a:spcPts val="300"/>
+              </a:spcBef>
+              <a:spcAft>
+                <a:spcPts val="300"/>
+              </a:spcAft>
+              <a:defRPr sz="1400">
+                <a:solidFill>
+                  <a:srgbClr val="282828"/>
+                </a:solidFill>
+              </a:defRPr>
+            </a:pPr>
+            <a:r>
+              <a:t>4️⃣ SLA Compliance Rate: (on-time / total) × 100% [Limit: 85% | Warning: 90%] | 5️⃣ Flagged Txn Volume (30d): (flagged amount / total) × 100% [Limit: 2% | Warning: 1.5%]</a:t>
+            </a:r>
+          </a:p>
+        </p:txBody>
+      </p:sp>
+      <p:sp>
+        <p:nvSpPr>
+          <p:cNvPr id="11" name="Rectangle 10"/>
+          <p:cNvSpPr/>
+          <p:nvPr/>
+        </p:nvSpPr>
+        <p:spPr>
+          <a:xfrm>
+            <a:off x="274320" y="4023360"/>
+            <a:ext cx="91440" cy="365760"/>
+          </a:xfrm>
+          <a:prstGeom prst="rect">
+            <a:avLst/>
+          </a:prstGeom>
+          <a:solidFill>
+            <a:srgbClr val="FF6600"/>
+          </a:solidFill>
+          <a:ln>
+            <a:solidFill>
+              <a:srgbClr val="FF6600"/>
+            </a:solidFill>
+          </a:ln>
+        </p:spPr>
+        <p:style>
+          <a:lnRef idx="1">
+            <a:schemeClr val="accent1"/>
+          </a:lnRef>
+          <a:fillRef idx="3">
+            <a:schemeClr val="accent1"/>
+          </a:fillRef>
+          <a:effectRef idx="2">
+            <a:schemeClr val="accent1"/>
+          </a:effectRef>
+          <a:fontRef idx="minor">
+            <a:schemeClr val="lt1"/>
+          </a:fontRef>
+        </p:style>
+        <p:txBody>
+          <a:bodyPr rtlCol="0" anchor="ctr"/>
+          <a:lstStyle/>
+          <a:p>
+            <a:pPr algn="ctr"/>
+          </a:p>
+        </p:txBody>
+      </p:sp>
+      <p:sp>
+        <p:nvSpPr>
+          <p:cNvPr id="12" name="TextBox 11"/>
+          <p:cNvSpPr txBox="1"/>
+          <p:nvPr/>
+        </p:nvSpPr>
+        <p:spPr>
+          <a:xfrm>
+            <a:off x="548640" y="4023360"/>
+            <a:ext cx="8229600" cy="320040"/>
+          </a:xfrm>
+          <a:prstGeom prst="rect">
+            <a:avLst/>
+          </a:prstGeom>
+          <a:noFill/>
+        </p:spPr>
+        <p:txBody>
+          <a:bodyPr wrap="none">
+            <a:spAutoFit/>
+          </a:bodyPr>
+          <a:lstStyle/>
+          <a:p>
+            <a:pPr>
+              <a:defRPr sz="1800" b="1">
+                <a:solidFill>
+                  <a:srgbClr val="4B55B4"/>
+                </a:solidFill>
+              </a:defRPr>
+            </a:pPr>
+            <a:r>
+              <a:t>⚠️ Status Indicators &amp; CRO Control</a:t>
+            </a:r>
+          </a:p>
+        </p:txBody>
+      </p:sp>
+      <p:sp>
+        <p:nvSpPr>
+          <p:cNvPr id="13" name="TextBox 12"/>
+          <p:cNvSpPr txBox="1"/>
+          <p:nvPr/>
+        </p:nvSpPr>
+        <p:spPr>
+          <a:xfrm>
+            <a:off x="548640" y="4389120"/>
+            <a:ext cx="8229600" cy="1097280"/>
+          </a:xfrm>
+          <a:prstGeom prst="rect">
+            <a:avLst/>
+          </a:prstGeom>
+          <a:noFill/>
+        </p:spPr>
+        <p:txBody>
+          <a:bodyPr wrap="square">
+            <a:spAutoFit/>
+          </a:bodyPr>
+          <a:lstStyle/>
+          <a:p>
+            <a:pPr>
+              <a:spcBef>
+                <a:spcPts val="300"/>
+              </a:spcBef>
+              <a:spcAft>
+                <a:spcPts val="300"/>
+              </a:spcAft>
+              <a:defRPr sz="1400">
+                <a:solidFill>
+                  <a:srgbClr val="282828"/>
+                </a:solidFill>
+              </a:defRPr>
+            </a:pPr>
+            <a:r>
+              <a:t>🟢 OK (within warning) | 🟡 WARNING (warning–limit) | 🔴 BREACH (exceeds limit). CRO adjusts thresholds on-the-fly via dashboard—no code changes, instant effect.</a:t>
             </a:r>
           </a:p>
         </p:txBody>
